--- a/Schools_ML_Track/camp_2026/slides/ML/ML21.pptx
+++ b/Schools_ML_Track/camp_2026/slides/ML/ML21.pptx
@@ -128,7 +128,7 @@
   <p:extLst>
     <p:ext uri="{521415D9-36F7-43E2-AB2F-B90AF26B5E84}">
       <p14:sectionLst xmlns:p14="http://schemas.microsoft.com/office/powerpoint/2010/main">
-        <p14:section name="Opening" id="{2e3adb6d-3ea0-c7d9-a5f6-fda93e3834a9}">
+        <p14:section name="Opening" id="{d50733fb-9b7e-fbdd-fe64-1a265f157a99}">
           <p14:sldIdLst>
             <p14:sldId id="256"/>
             <p14:sldId id="257"/>
@@ -139,7 +139,7 @@
             <p14:sldId id="262"/>
           </p14:sldIdLst>
         </p14:section>
-        <p14:section name="Block A" id="{333e1efd-af01-d00f-0704-3b3a9b53acb8}">
+        <p14:section name="Block A" id="{7e40726e-cc17-9079-d8e8-bcbdb0b49e91}">
           <p14:sldIdLst>
             <p14:sldId id="263"/>
             <p14:sldId id="264"/>
@@ -149,15 +149,15 @@
             <p14:sldId id="269"/>
           </p14:sldIdLst>
         </p14:section>
-        <p14:section name="Break" id="{3c741ed1-02c2-6dfd-669a-6b2a10aad14b}">
+        <p14:section name="Break" id="{c5a8f88a-6acb-2bde-811c-d42db9b45533}">
           <p14:sldIdLst>
             <p14:sldId id="267"/>
           </p14:sldIdLst>
         </p14:section>
-        <p14:section name="Block A" id="{456ce114-70f9-afda-b5ea-8e81d057c878}">
+        <p14:section name="Block A" id="{8f4702f4-8a3b-caf5-6bf8-1f93c76cdec4}">
           <p14:sldIdLst/>
         </p14:section>
-        <p14:section name="Block B" id="{ac347759-77ea-c8a8-14f2-bcd20f93b6af}">
+        <p14:section name="Block B" id="{2b2ae29f-98d5-113f-5857-771d93c37bcc}">
           <p14:sldIdLst>
             <p14:sldId id="270"/>
             <p14:sldId id="271"/>
@@ -166,7 +166,7 @@
             <p14:sldId id="274"/>
           </p14:sldIdLst>
         </p14:section>
-        <p14:section name="Make and close" id="{33a79f58-617b-663c-f3a9-8c082f63b269}">
+        <p14:section name="Make and close" id="{58204e47-1102-f871-d088-24c1bf567b00}">
           <p14:sldIdLst>
             <p14:sldId id="275"/>
             <p14:sldId id="276"/>

--- a/Schools_ML_Track/camp_2026/slides/ML/ML21.pptx
+++ b/Schools_ML_Track/camp_2026/slides/ML/ML21.pptx
@@ -128,7 +128,7 @@
   <p:extLst>
     <p:ext uri="{521415D9-36F7-43E2-AB2F-B90AF26B5E84}">
       <p14:sectionLst xmlns:p14="http://schemas.microsoft.com/office/powerpoint/2010/main">
-        <p14:section name="Opening" id="{d50733fb-9b7e-fbdd-fe64-1a265f157a99}">
+        <p14:section name="Opening" id="{76cf24d2-5bce-d4fc-b3cd-945db68ad988}">
           <p14:sldIdLst>
             <p14:sldId id="256"/>
             <p14:sldId id="257"/>
@@ -139,7 +139,7 @@
             <p14:sldId id="262"/>
           </p14:sldIdLst>
         </p14:section>
-        <p14:section name="Block A" id="{7e40726e-cc17-9079-d8e8-bcbdb0b49e91}">
+        <p14:section name="Block A" id="{a8bc7663-d55f-2239-2d99-089711285737}">
           <p14:sldIdLst>
             <p14:sldId id="263"/>
             <p14:sldId id="264"/>
@@ -149,15 +149,15 @@
             <p14:sldId id="269"/>
           </p14:sldIdLst>
         </p14:section>
-        <p14:section name="Break" id="{c5a8f88a-6acb-2bde-811c-d42db9b45533}">
+        <p14:section name="Break" id="{c67330b5-b662-2cc7-6efc-dca09d5ee27a}">
           <p14:sldIdLst>
             <p14:sldId id="267"/>
           </p14:sldIdLst>
         </p14:section>
-        <p14:section name="Block A" id="{8f4702f4-8a3b-caf5-6bf8-1f93c76cdec4}">
+        <p14:section name="Block A" id="{eeb814b5-842e-13d7-4e52-0d2b95f7d18d}">
           <p14:sldIdLst/>
         </p14:section>
-        <p14:section name="Block B" id="{2b2ae29f-98d5-113f-5857-771d93c37bcc}">
+        <p14:section name="Block B" id="{5c8062cf-3590-9be3-b42e-216b9734c2fa}">
           <p14:sldIdLst>
             <p14:sldId id="270"/>
             <p14:sldId id="271"/>
@@ -166,7 +166,7 @@
             <p14:sldId id="274"/>
           </p14:sldIdLst>
         </p14:section>
-        <p14:section name="Make and close" id="{58204e47-1102-f871-d088-24c1bf567b00}">
+        <p14:section name="Make and close" id="{d95bb938-f034-9fd2-20c4-22481f537fbc}">
           <p14:sldIdLst>
             <p14:sldId id="275"/>
             <p14:sldId id="276"/>
@@ -5336,453 +5336,40 @@
           </a:p>
         </p:txBody>
       </p:sp>
-      <p:sp>
-        <p:nvSpPr>
-          <p:cNvPr id="3" name="Shape 1"/>
-          <p:cNvSpPr/>
+      <p:pic>
+        <p:nvPicPr>
+          <p:cNvPr id="3" name="Image 0" descr="Look closely">    </p:cNvPr>
+          <p:cNvPicPr>
+            <a:picLocks noChangeAspect="1"/>
+          </p:cNvPicPr>
           <p:nvPr/>
-        </p:nvSpPr>
-        <p:spPr>
-          <a:xfrm>
-            <a:off x="7498080" y="1737360"/>
-            <a:ext cx="4023360" cy="3410712"/>
-          </a:xfrm>
-          <a:prstGeom prst="roundRect">
-            <a:avLst>
-              <a:gd name="adj" fmla="val 2145"/>
-            </a:avLst>
-          </a:prstGeom>
-          <a:solidFill>
-            <a:srgbClr val="111111"/>
-          </a:solidFill>
-          <a:ln/>
-        </p:spPr>
-      </p:sp>
-      <p:sp>
-        <p:nvSpPr>
-          <p:cNvPr id="4" name="Text 2"/>
+        </p:nvPicPr>
+        <p:blipFill>
+          <a:blip r:embed="rId1"/>
+          <a:stretch>
+            <a:fillRect/>
+          </a:stretch>
+        </p:blipFill>
+        <p:spPr>
+          <a:xfrm>
+            <a:off x="9875520" y="4480560"/>
+            <a:ext cx="1645920" cy="1645920"/>
+          </a:xfrm>
+          <a:prstGeom prst="rect">
+            <a:avLst/>
+          </a:prstGeom>
+        </p:spPr>
+      </p:pic>
+      <p:sp>
+        <p:nvSpPr>
+          <p:cNvPr id="4" name="Text 1"/>
           <p:cNvSpPr txBox="1"/>
           <p:nvPr/>
         </p:nvSpPr>
         <p:spPr>
           <a:xfrm>
-            <a:off x="7699248" y="1938528"/>
-            <a:ext cx="3621024" cy="3008376"/>
-          </a:xfrm>
-          <a:prstGeom prst="rect">
-            <a:avLst/>
-          </a:prstGeom>
-          <a:noFill/>
-          <a:ln/>
-        </p:spPr>
-        <p:txBody>
-          <a:bodyPr wrap="square" lIns="0" tIns="0" rIns="0" bIns="0" rtlCol="0" anchor="t"/>
-          <a:lstStyle/>
-          <a:p>
-            <a:pPr algn="l" indent="0" marL="0">
-              <a:lnSpc>
-                <a:spcPts val="1950"/>
-              </a:lnSpc>
-              <a:buNone/>
-            </a:pPr>
-            <a:r>
-              <a:rPr lang="en-US" sz="1500" b="1" dirty="0">
-                <a:solidFill>
-                  <a:srgbClr val="FFFFFF"/>
-                </a:solidFill>
-                <a:latin typeface="Courier New" pitchFamily="34" charset="0"/>
-                <a:ea typeface="Courier New" pitchFamily="34" charset="-122"/>
-                <a:cs typeface="Courier New" pitchFamily="34" charset="-120"/>
-              </a:rPr>
-              <a:t>def</a:t>
-            </a:r>
-            <a:pPr algn="l" indent="0" marL="0">
-              <a:lnSpc>
-                <a:spcPts val="1950"/>
-              </a:lnSpc>
-              <a:buNone/>
-            </a:pPr>
-            <a:r>
-              <a:rPr lang="en-US" sz="1500" dirty="0">
-                <a:solidFill>
-                  <a:srgbClr val="FFFFFF"/>
-                </a:solidFill>
-                <a:latin typeface="Courier New" pitchFamily="34" charset="0"/>
-                <a:ea typeface="Courier New" pitchFamily="34" charset="-122"/>
-                <a:cs typeface="Courier New" pitchFamily="34" charset="-120"/>
-              </a:rPr>
-              <a:t> total(price, quantity):</a:t>
-            </a:r>
-            <a:endParaRPr lang="en-US" sz="1500" dirty="0"/>
-          </a:p>
-          <a:p>
-            <a:pPr algn="l" indent="0" marL="0">
-              <a:lnSpc>
-                <a:spcPts val="1950"/>
-              </a:lnSpc>
-              <a:buNone/>
-            </a:pPr>
-            <a:r>
-              <a:rPr lang="en-US" sz="1500" dirty="0">
-                <a:solidFill>
-                  <a:srgbClr val="FFFFFF"/>
-                </a:solidFill>
-                <a:latin typeface="Courier New" pitchFamily="34" charset="0"/>
-                <a:ea typeface="Courier New" pitchFamily="34" charset="-122"/>
-                <a:cs typeface="Courier New" pitchFamily="34" charset="-120"/>
-              </a:rPr>
-              <a:t>    </a:t>
-            </a:r>
-            <a:pPr algn="l" indent="0" marL="0">
-              <a:lnSpc>
-                <a:spcPts val="1950"/>
-              </a:lnSpc>
-              <a:buNone/>
-            </a:pPr>
-            <a:r>
-              <a:rPr lang="en-US" sz="1500" b="1" dirty="0">
-                <a:solidFill>
-                  <a:srgbClr val="FFFFFF"/>
-                </a:solidFill>
-                <a:latin typeface="Courier New" pitchFamily="34" charset="0"/>
-                <a:ea typeface="Courier New" pitchFamily="34" charset="-122"/>
-                <a:cs typeface="Courier New" pitchFamily="34" charset="-120"/>
-              </a:rPr>
-              <a:t>return</a:t>
-            </a:r>
-            <a:pPr algn="l" indent="0" marL="0">
-              <a:lnSpc>
-                <a:spcPts val="1950"/>
-              </a:lnSpc>
-              <a:buNone/>
-            </a:pPr>
-            <a:r>
-              <a:rPr lang="en-US" sz="1500" dirty="0">
-                <a:solidFill>
-                  <a:srgbClr val="FFFFFF"/>
-                </a:solidFill>
-                <a:latin typeface="Courier New" pitchFamily="34" charset="0"/>
-                <a:ea typeface="Courier New" pitchFamily="34" charset="-122"/>
-                <a:cs typeface="Courier New" pitchFamily="34" charset="-120"/>
-              </a:rPr>
-              <a:t> price + quantity</a:t>
-            </a:r>
-            <a:endParaRPr lang="en-US" sz="1500" dirty="0"/>
-          </a:p>
-          <a:p>
-            <a:pPr algn="l" indent="0" marL="0">
-              <a:lnSpc>
-                <a:spcPts val="1950"/>
-              </a:lnSpc>
-              <a:buNone/>
-            </a:pPr>
-            <a:r>
-              <a:rPr lang="en-US" sz="1500" dirty="0">
-                <a:solidFill>
-                  <a:srgbClr val="FFFFFF"/>
-                </a:solidFill>
-                <a:latin typeface="Courier New" pitchFamily="34" charset="0"/>
-                <a:ea typeface="Courier New" pitchFamily="34" charset="-122"/>
-                <a:cs typeface="Courier New" pitchFamily="34" charset="-120"/>
-              </a:rPr>
-              <a:t> </a:t>
-            </a:r>
-            <a:endParaRPr lang="en-US" sz="1500" dirty="0"/>
-          </a:p>
-          <a:p>
-            <a:pPr algn="l" indent="0" marL="0">
-              <a:lnSpc>
-                <a:spcPts val="1950"/>
-              </a:lnSpc>
-              <a:buNone/>
-            </a:pPr>
-            <a:r>
-              <a:rPr lang="en-US" sz="1500" dirty="0">
-                <a:solidFill>
-                  <a:srgbClr val="FFFFFF"/>
-                </a:solidFill>
-                <a:latin typeface="Courier New" pitchFamily="34" charset="0"/>
-                <a:ea typeface="Courier New" pitchFamily="34" charset="-122"/>
-                <a:cs typeface="Courier New" pitchFamily="34" charset="-120"/>
-              </a:rPr>
-              <a:t>buggy_result = total(2000, 3)</a:t>
-            </a:r>
-            <a:endParaRPr lang="en-US" sz="1500" dirty="0"/>
-          </a:p>
-          <a:p>
-            <a:pPr algn="l" indent="0" marL="0">
-              <a:lnSpc>
-                <a:spcPts val="1950"/>
-              </a:lnSpc>
-              <a:buNone/>
-            </a:pPr>
-            <a:r>
-              <a:rPr lang="en-US" sz="1500" dirty="0">
-                <a:solidFill>
-                  <a:srgbClr val="FFFFFF"/>
-                </a:solidFill>
-                <a:latin typeface="Courier New" pitchFamily="34" charset="0"/>
-                <a:ea typeface="Courier New" pitchFamily="34" charset="-122"/>
-                <a:cs typeface="Courier New" pitchFamily="34" charset="-120"/>
-              </a:rPr>
-              <a:t>print(buggy_result)</a:t>
-            </a:r>
-            <a:endParaRPr lang="en-US" sz="1500" dirty="0"/>
-          </a:p>
-          <a:p>
-            <a:pPr algn="l" indent="0" marL="0">
-              <a:lnSpc>
-                <a:spcPts val="1950"/>
-              </a:lnSpc>
-              <a:buNone/>
-            </a:pPr>
-            <a:r>
-              <a:rPr lang="en-US" sz="1500" dirty="0">
-                <a:solidFill>
-                  <a:srgbClr val="FFFFFF"/>
-                </a:solidFill>
-                <a:latin typeface="Courier New" pitchFamily="34" charset="0"/>
-                <a:ea typeface="Courier New" pitchFamily="34" charset="-122"/>
-                <a:cs typeface="Courier New" pitchFamily="34" charset="-120"/>
-              </a:rPr>
-              <a:t> </a:t>
-            </a:r>
-            <a:endParaRPr lang="en-US" sz="1500" dirty="0"/>
-          </a:p>
-          <a:p>
-            <a:pPr algn="l" indent="0" marL="0">
-              <a:lnSpc>
-                <a:spcPts val="1950"/>
-              </a:lnSpc>
-              <a:buNone/>
-            </a:pPr>
-            <a:r>
-              <a:rPr lang="en-US" sz="1500" b="1" dirty="0">
-                <a:solidFill>
-                  <a:srgbClr val="FFFFFF"/>
-                </a:solidFill>
-                <a:latin typeface="Courier New" pitchFamily="34" charset="0"/>
-                <a:ea typeface="Courier New" pitchFamily="34" charset="-122"/>
-                <a:cs typeface="Courier New" pitchFamily="34" charset="-120"/>
-              </a:rPr>
-              <a:t>def</a:t>
-            </a:r>
-            <a:pPr algn="l" indent="0" marL="0">
-              <a:lnSpc>
-                <a:spcPts val="1950"/>
-              </a:lnSpc>
-              <a:buNone/>
-            </a:pPr>
-            <a:r>
-              <a:rPr lang="en-US" sz="1500" dirty="0">
-                <a:solidFill>
-                  <a:srgbClr val="FFFFFF"/>
-                </a:solidFill>
-                <a:latin typeface="Courier New" pitchFamily="34" charset="0"/>
-                <a:ea typeface="Courier New" pitchFamily="34" charset="-122"/>
-                <a:cs typeface="Courier New" pitchFamily="34" charset="-120"/>
-              </a:rPr>
-              <a:t> total(price, quantity):</a:t>
-            </a:r>
-            <a:endParaRPr lang="en-US" sz="1500" dirty="0"/>
-          </a:p>
-          <a:p>
-            <a:pPr algn="l" indent="0" marL="0">
-              <a:lnSpc>
-                <a:spcPts val="1950"/>
-              </a:lnSpc>
-              <a:buNone/>
-            </a:pPr>
-            <a:r>
-              <a:rPr lang="en-US" sz="1500" dirty="0">
-                <a:solidFill>
-                  <a:srgbClr val="FFFFFF"/>
-                </a:solidFill>
-                <a:latin typeface="Courier New" pitchFamily="34" charset="0"/>
-                <a:ea typeface="Courier New" pitchFamily="34" charset="-122"/>
-                <a:cs typeface="Courier New" pitchFamily="34" charset="-120"/>
-              </a:rPr>
-              <a:t>    </a:t>
-            </a:r>
-            <a:pPr algn="l" indent="0" marL="0">
-              <a:lnSpc>
-                <a:spcPts val="1950"/>
-              </a:lnSpc>
-              <a:buNone/>
-            </a:pPr>
-            <a:r>
-              <a:rPr lang="en-US" sz="1500" b="1" dirty="0">
-                <a:solidFill>
-                  <a:srgbClr val="FFFFFF"/>
-                </a:solidFill>
-                <a:latin typeface="Courier New" pitchFamily="34" charset="0"/>
-                <a:ea typeface="Courier New" pitchFamily="34" charset="-122"/>
-                <a:cs typeface="Courier New" pitchFamily="34" charset="-120"/>
-              </a:rPr>
-              <a:t>return</a:t>
-            </a:r>
-            <a:pPr algn="l" indent="0" marL="0">
-              <a:lnSpc>
-                <a:spcPts val="1950"/>
-              </a:lnSpc>
-              <a:buNone/>
-            </a:pPr>
-            <a:r>
-              <a:rPr lang="en-US" sz="1500" dirty="0">
-                <a:solidFill>
-                  <a:srgbClr val="FFFFFF"/>
-                </a:solidFill>
-                <a:latin typeface="Courier New" pitchFamily="34" charset="0"/>
-                <a:ea typeface="Courier New" pitchFamily="34" charset="-122"/>
-                <a:cs typeface="Courier New" pitchFamily="34" charset="-120"/>
-              </a:rPr>
-              <a:t> price * quantity</a:t>
-            </a:r>
-            <a:endParaRPr lang="en-US" sz="1500" dirty="0"/>
-          </a:p>
-          <a:p>
-            <a:pPr algn="l" indent="0" marL="0">
-              <a:lnSpc>
-                <a:spcPts val="1950"/>
-              </a:lnSpc>
-              <a:buNone/>
-            </a:pPr>
-            <a:r>
-              <a:rPr lang="en-US" sz="1500" dirty="0">
-                <a:solidFill>
-                  <a:srgbClr val="FFFFFF"/>
-                </a:solidFill>
-                <a:latin typeface="Courier New" pitchFamily="34" charset="0"/>
-                <a:ea typeface="Courier New" pitchFamily="34" charset="-122"/>
-                <a:cs typeface="Courier New" pitchFamily="34" charset="-120"/>
-              </a:rPr>
-              <a:t> </a:t>
-            </a:r>
-            <a:endParaRPr lang="en-US" sz="1500" dirty="0"/>
-          </a:p>
-          <a:p>
-            <a:pPr algn="l" indent="0" marL="0">
-              <a:lnSpc>
-                <a:spcPts val="1950"/>
-              </a:lnSpc>
-              <a:buNone/>
-            </a:pPr>
-            <a:r>
-              <a:rPr lang="en-US" sz="1500" b="1" dirty="0">
-                <a:solidFill>
-                  <a:srgbClr val="FFFFFF"/>
-                </a:solidFill>
-                <a:latin typeface="Courier New" pitchFamily="34" charset="0"/>
-                <a:ea typeface="Courier New" pitchFamily="34" charset="-122"/>
-                <a:cs typeface="Courier New" pitchFamily="34" charset="-120"/>
-              </a:rPr>
-              <a:t>assert</a:t>
-            </a:r>
-            <a:pPr algn="l" indent="0" marL="0">
-              <a:lnSpc>
-                <a:spcPts val="1950"/>
-              </a:lnSpc>
-              <a:buNone/>
-            </a:pPr>
-            <a:r>
-              <a:rPr lang="en-US" sz="1500" dirty="0">
-                <a:solidFill>
-                  <a:srgbClr val="FFFFFF"/>
-                </a:solidFill>
-                <a:latin typeface="Courier New" pitchFamily="34" charset="0"/>
-                <a:ea typeface="Courier New" pitchFamily="34" charset="-122"/>
-                <a:cs typeface="Courier New" pitchFamily="34" charset="-120"/>
-              </a:rPr>
-              <a:t> total(2000, 3) == 6000</a:t>
-            </a:r>
-            <a:endParaRPr lang="en-US" sz="1500" dirty="0"/>
-          </a:p>
-          <a:p>
-            <a:pPr algn="l" indent="0" marL="0">
-              <a:lnSpc>
-                <a:spcPts val="1950"/>
-              </a:lnSpc>
-              <a:buNone/>
-            </a:pPr>
-            <a:r>
-              <a:rPr lang="en-US" sz="1500" b="1" dirty="0">
-                <a:solidFill>
-                  <a:srgbClr val="FFFFFF"/>
-                </a:solidFill>
-                <a:latin typeface="Courier New" pitchFamily="34" charset="0"/>
-                <a:ea typeface="Courier New" pitchFamily="34" charset="-122"/>
-                <a:cs typeface="Courier New" pitchFamily="34" charset="-120"/>
-              </a:rPr>
-              <a:t>assert</a:t>
-            </a:r>
-            <a:pPr algn="l" indent="0" marL="0">
-              <a:lnSpc>
-                <a:spcPts val="1950"/>
-              </a:lnSpc>
-              <a:buNone/>
-            </a:pPr>
-            <a:r>
-              <a:rPr lang="en-US" sz="1500" dirty="0">
-                <a:solidFill>
-                  <a:srgbClr val="FFFFFF"/>
-                </a:solidFill>
-                <a:latin typeface="Courier New" pitchFamily="34" charset="0"/>
-                <a:ea typeface="Courier New" pitchFamily="34" charset="-122"/>
-                <a:cs typeface="Courier New" pitchFamily="34" charset="-120"/>
-              </a:rPr>
-              <a:t> total(1000, 0) == 0</a:t>
-            </a:r>
-            <a:endParaRPr lang="en-US" sz="1500" dirty="0"/>
-          </a:p>
-          <a:p>
-            <a:pPr algn="l" indent="0" marL="0">
-              <a:lnSpc>
-                <a:spcPts val="1950"/>
-              </a:lnSpc>
-              <a:buNone/>
-            </a:pPr>
-            <a:r>
-              <a:rPr lang="en-US" sz="1500" b="1" dirty="0">
-                <a:solidFill>
-                  <a:srgbClr val="FFFFFF"/>
-                </a:solidFill>
-                <a:latin typeface="Courier New" pitchFamily="34" charset="0"/>
-                <a:ea typeface="Courier New" pitchFamily="34" charset="-122"/>
-                <a:cs typeface="Courier New" pitchFamily="34" charset="-120"/>
-              </a:rPr>
-              <a:t>assert</a:t>
-            </a:r>
-            <a:pPr algn="l" indent="0" marL="0">
-              <a:lnSpc>
-                <a:spcPts val="1950"/>
-              </a:lnSpc>
-              <a:buNone/>
-            </a:pPr>
-            <a:r>
-              <a:rPr lang="en-US" sz="1500" dirty="0">
-                <a:solidFill>
-                  <a:srgbClr val="FFFFFF"/>
-                </a:solidFill>
-                <a:latin typeface="Courier New" pitchFamily="34" charset="0"/>
-                <a:ea typeface="Courier New" pitchFamily="34" charset="-122"/>
-                <a:cs typeface="Courier New" pitchFamily="34" charset="-120"/>
-              </a:rPr>
-              <a:t> total(1000, 1) == 1000</a:t>
-            </a:r>
-            <a:endParaRPr lang="en-US" sz="1500" dirty="0"/>
-          </a:p>
-        </p:txBody>
-      </p:sp>
-      <p:sp>
-        <p:nvSpPr>
-          <p:cNvPr id="5" name="Text 3"/>
-          <p:cNvSpPr txBox="1"/>
-          <p:nvPr/>
-        </p:nvSpPr>
-        <p:spPr>
-          <a:xfrm>
             <a:off x="640080" y="1737360"/>
-            <a:ext cx="6400800" cy="4389120"/>
+            <a:ext cx="8961120" cy="4389120"/>
           </a:xfrm>
           <a:prstGeom prst="rect">
             <a:avLst/>
@@ -7004,15 +6591,15 @@
           <a:p>
             <a:pPr algn="l" indent="0" marL="0">
               <a:lnSpc>
-                <a:spcPts val="3360"/>
+                <a:spcPts val="3240"/>
               </a:lnSpc>
               <a:spcAft>
-                <a:spcPts val="2520"/>
+                <a:spcPts val="2020"/>
               </a:spcAft>
               <a:buNone/>
             </a:pPr>
             <a:r>
-              <a:rPr lang="en-US" sz="2800" dirty="0">
+              <a:rPr lang="en-US" sz="2700" dirty="0">
                 <a:solidFill>
                   <a:srgbClr val="111111"/>
                 </a:solidFill>
@@ -7020,22 +6607,22 @@
                 <a:ea typeface="Lato" pitchFamily="34" charset="-122"/>
                 <a:cs typeface="Lato" pitchFamily="34" charset="-120"/>
               </a:rPr>
-              <a:t>Add model code, the validation error and a short decision to project.ipynb. Ask a partner to name your target and baseline from the notebook alone. Record any assistance in AI_USE_LOG.md or write No AI assistance used.</a:t>
-            </a:r>
-            <a:endParaRPr lang="en-US" sz="2800" dirty="0"/>
-          </a:p>
-          <a:p>
-            <a:pPr algn="l" indent="0" marL="0">
-              <a:lnSpc>
-                <a:spcPts val="3360"/>
+              <a:t>Add model code, the validation error and a short decision to project.ipynb.</a:t>
+            </a:r>
+            <a:endParaRPr lang="en-US" sz="2700" dirty="0"/>
+          </a:p>
+          <a:p>
+            <a:pPr algn="l" indent="0" marL="0">
+              <a:lnSpc>
+                <a:spcPts val="3240"/>
               </a:lnSpc>
               <a:spcAft>
-                <a:spcPts val="2520"/>
+                <a:spcPts val="2020"/>
               </a:spcAft>
               <a:buNone/>
             </a:pPr>
             <a:r>
-              <a:rPr lang="en-US" sz="2800" dirty="0">
+              <a:rPr lang="en-US" sz="2700" dirty="0">
                 <a:solidFill>
                   <a:srgbClr val="111111"/>
                 </a:solidFill>
@@ -7043,9 +6630,55 @@
                 <a:ea typeface="Lato" pitchFamily="34" charset="-122"/>
                 <a:cs typeface="Lato" pitchFamily="34" charset="-120"/>
               </a:rPr>
+              <a:t>Ask a partner to name your target and baseline from the notebook alone.</a:t>
+            </a:r>
+            <a:endParaRPr lang="en-US" sz="2700" dirty="0"/>
+          </a:p>
+          <a:p>
+            <a:pPr algn="l" indent="0" marL="0">
+              <a:lnSpc>
+                <a:spcPts val="3240"/>
+              </a:lnSpc>
+              <a:spcAft>
+                <a:spcPts val="2020"/>
+              </a:spcAft>
+              <a:buNone/>
+            </a:pPr>
+            <a:r>
+              <a:rPr lang="en-US" sz="2700" dirty="0">
+                <a:solidFill>
+                  <a:srgbClr val="111111"/>
+                </a:solidFill>
+                <a:latin typeface="Lato" pitchFamily="34" charset="0"/>
+                <a:ea typeface="Lato" pitchFamily="34" charset="-122"/>
+                <a:cs typeface="Lato" pitchFamily="34" charset="-120"/>
+              </a:rPr>
+              <a:t>Record any assistance in AI_USE_LOG.md or write No AI assistance used.</a:t>
+            </a:r>
+            <a:endParaRPr lang="en-US" sz="2700" dirty="0"/>
+          </a:p>
+          <a:p>
+            <a:pPr algn="l" indent="0" marL="0">
+              <a:lnSpc>
+                <a:spcPts val="3240"/>
+              </a:lnSpc>
+              <a:spcAft>
+                <a:spcPts val="2020"/>
+              </a:spcAft>
+              <a:buNone/>
+            </a:pPr>
+            <a:r>
+              <a:rPr lang="en-US" sz="2700" dirty="0">
+                <a:solidFill>
+                  <a:srgbClr val="111111"/>
+                </a:solidFill>
+                <a:latin typeface="Lato" pitchFamily="34" charset="0"/>
+                <a:ea typeface="Lato" pitchFamily="34" charset="-122"/>
+                <a:cs typeface="Lato" pitchFamily="34" charset="-120"/>
+              </a:rPr>
               <a:t>Save it as ML21. Write two sentences: what you changed and how you checked it.</a:t>
             </a:r>
-            <a:endParaRPr lang="en-US" sz="2800" dirty="0"/>
+            <a:endParaRPr lang="en-US" sz="2700" dirty="0"/>
           </a:p>
         </p:txBody>
       </p:sp>
